--- a/Plano_V02_i_AM_FEG_pdfs/02_AM PravaH®_____________PPT_____________.pptx
+++ b/Plano_V02_i_AM_FEG_pdfs/02_AM PravaH®_____________PPT_____________.pptx
@@ -268,7 +268,7 @@
           <a:p>
             <a:fld id="{D826BA47-DACA-4AF9-9804-DDBF2735F23A}" type="datetimeFigureOut">
               <a:rPr lang="LID4096" smtClean="0"/>
-              <a:t>08/25/2026</a:t>
+              <a:t>09/30/2026</a:t>
             </a:fld>
             <a:endParaRPr lang="LID4096"/>
           </a:p>
@@ -468,7 +468,7 @@
           <a:p>
             <a:fld id="{D826BA47-DACA-4AF9-9804-DDBF2735F23A}" type="datetimeFigureOut">
               <a:rPr lang="LID4096" smtClean="0"/>
-              <a:t>08/25/2026</a:t>
+              <a:t>09/30/2026</a:t>
             </a:fld>
             <a:endParaRPr lang="LID4096"/>
           </a:p>
@@ -678,7 +678,7 @@
           <a:p>
             <a:fld id="{D826BA47-DACA-4AF9-9804-DDBF2735F23A}" type="datetimeFigureOut">
               <a:rPr lang="LID4096" smtClean="0"/>
-              <a:t>08/25/2026</a:t>
+              <a:t>09/30/2026</a:t>
             </a:fld>
             <a:endParaRPr lang="LID4096"/>
           </a:p>
@@ -878,7 +878,7 @@
           <a:p>
             <a:fld id="{D826BA47-DACA-4AF9-9804-DDBF2735F23A}" type="datetimeFigureOut">
               <a:rPr lang="LID4096" smtClean="0"/>
-              <a:t>08/25/2026</a:t>
+              <a:t>09/30/2026</a:t>
             </a:fld>
             <a:endParaRPr lang="LID4096"/>
           </a:p>
@@ -1154,7 +1154,7 @@
           <a:p>
             <a:fld id="{D826BA47-DACA-4AF9-9804-DDBF2735F23A}" type="datetimeFigureOut">
               <a:rPr lang="LID4096" smtClean="0"/>
-              <a:t>08/25/2026</a:t>
+              <a:t>09/30/2026</a:t>
             </a:fld>
             <a:endParaRPr lang="LID4096"/>
           </a:p>
@@ -1422,7 +1422,7 @@
           <a:p>
             <a:fld id="{D826BA47-DACA-4AF9-9804-DDBF2735F23A}" type="datetimeFigureOut">
               <a:rPr lang="LID4096" smtClean="0"/>
-              <a:t>08/25/2026</a:t>
+              <a:t>09/30/2026</a:t>
             </a:fld>
             <a:endParaRPr lang="LID4096"/>
           </a:p>
@@ -1837,7 +1837,7 @@
           <a:p>
             <a:fld id="{D826BA47-DACA-4AF9-9804-DDBF2735F23A}" type="datetimeFigureOut">
               <a:rPr lang="LID4096" smtClean="0"/>
-              <a:t>08/25/2026</a:t>
+              <a:t>09/30/2026</a:t>
             </a:fld>
             <a:endParaRPr lang="LID4096"/>
           </a:p>
@@ -1979,7 +1979,7 @@
           <a:p>
             <a:fld id="{D826BA47-DACA-4AF9-9804-DDBF2735F23A}" type="datetimeFigureOut">
               <a:rPr lang="LID4096" smtClean="0"/>
-              <a:t>08/25/2026</a:t>
+              <a:t>09/30/2026</a:t>
             </a:fld>
             <a:endParaRPr lang="LID4096"/>
           </a:p>
@@ -2092,7 +2092,7 @@
           <a:p>
             <a:fld id="{D826BA47-DACA-4AF9-9804-DDBF2735F23A}" type="datetimeFigureOut">
               <a:rPr lang="LID4096" smtClean="0"/>
-              <a:t>08/25/2026</a:t>
+              <a:t>09/30/2026</a:t>
             </a:fld>
             <a:endParaRPr lang="LID4096"/>
           </a:p>
@@ -2405,7 +2405,7 @@
           <a:p>
             <a:fld id="{D826BA47-DACA-4AF9-9804-DDBF2735F23A}" type="datetimeFigureOut">
               <a:rPr lang="LID4096" smtClean="0"/>
-              <a:t>08/25/2026</a:t>
+              <a:t>09/30/2026</a:t>
             </a:fld>
             <a:endParaRPr lang="LID4096"/>
           </a:p>
@@ -2694,7 +2694,7 @@
           <a:p>
             <a:fld id="{D826BA47-DACA-4AF9-9804-DDBF2735F23A}" type="datetimeFigureOut">
               <a:rPr lang="LID4096" smtClean="0"/>
-              <a:t>08/25/2026</a:t>
+              <a:t>09/30/2026</a:t>
             </a:fld>
             <a:endParaRPr lang="LID4096"/>
           </a:p>
@@ -2937,7 +2937,7 @@
           <a:p>
             <a:fld id="{D826BA47-DACA-4AF9-9804-DDBF2735F23A}" type="datetimeFigureOut">
               <a:rPr lang="LID4096" smtClean="0"/>
-              <a:t>08/25/2026</a:t>
+              <a:t>09/30/2026</a:t>
             </a:fld>
             <a:endParaRPr lang="LID4096"/>
           </a:p>
@@ -8141,6 +8141,49 @@
           </a:p>
         </p:txBody>
       </p:sp>
+      <p:pic>
+        <p:nvPicPr>
+          <p:cNvPr id="14" name="Picture 13">
+            <a:extLst>
+              <a:ext uri="{FF2B5EF4-FFF2-40B4-BE49-F238E27FC236}">
+                <a16:creationId xmlns:a16="http://schemas.microsoft.com/office/drawing/2014/main" id="{1B7DEF55-FD69-79E0-F4F4-73CCF8E64918}"/>
+              </a:ext>
+            </a:extLst>
+          </p:cNvPr>
+          <p:cNvPicPr>
+            <a:picLocks noChangeAspect="1"/>
+          </p:cNvPicPr>
+          <p:nvPr/>
+        </p:nvPicPr>
+        <p:blipFill>
+          <a:blip r:embed="rId2"/>
+          <a:srcRect l="89626" b="83563"/>
+          <a:stretch>
+            <a:fillRect/>
+          </a:stretch>
+        </p:blipFill>
+        <p:spPr>
+          <a:xfrm>
+            <a:off x="10904084" y="90156"/>
+            <a:ext cx="1191345" cy="856623"/>
+          </a:xfrm>
+          <a:prstGeom prst="rect">
+            <a:avLst/>
+          </a:prstGeom>
+          <a:ln>
+            <a:solidFill>
+              <a:schemeClr val="tx1"/>
+            </a:solidFill>
+          </a:ln>
+          <a:effectLst>
+            <a:outerShdw blurRad="50800" dist="38100" dir="8100000" algn="tr" rotWithShape="0">
+              <a:prstClr val="black">
+                <a:alpha val="40000"/>
+              </a:prstClr>
+            </a:outerShdw>
+          </a:effectLst>
+        </p:spPr>
+      </p:pic>
     </p:spTree>
     <p:extLst>
       <p:ext uri="{BB962C8B-B14F-4D97-AF65-F5344CB8AC3E}">
